--- a/2Bim/Alg de Ordenação/11_Heap Sort.pptx
+++ b/2Bim/Alg de Ordenação/11_Heap Sort.pptx
@@ -23,6 +23,9 @@
     <p:sldId id="271" r:id="rId17"/>
     <p:sldId id="272" r:id="rId18"/>
     <p:sldId id="273" r:id="rId19"/>
+    <p:sldId id="274" r:id="rId20"/>
+    <p:sldId id="275" r:id="rId21"/>
+    <p:sldId id="276" r:id="rId22"/>
   </p:sldIdLst>
   <p:sldSz cx="12192000" cy="6858000"/>
   <p:notesSz cx="6858000" cy="9144000"/>
@@ -121,6 +124,11 @@
       </a:defRPr>
     </a:lvl9pPr>
   </p:defaultTextStyle>
+  <p:extLst>
+    <p:ext uri="{EFAFB233-063F-42B5-8137-9DF3F51BA10A}">
+      <p15:sldGuideLst xmlns:p15="http://schemas.microsoft.com/office/powerpoint/2012/main"/>
+    </p:ext>
+  </p:extLst>
 </p:presentation>
 </file>
 
@@ -5173,6 +5181,146 @@
 </p:sld>
 </file>
 
+<file path=ppt/slides/slide19.xml><?xml version="1.0" encoding="utf-8"?>
+<p:sld xmlns:a="http://schemas.openxmlformats.org/drawingml/2006/main" xmlns:r="http://schemas.openxmlformats.org/officeDocument/2006/relationships" xmlns:p="http://schemas.openxmlformats.org/presentationml/2006/main">
+  <p:cSld>
+    <p:spTree>
+      <p:nvGrpSpPr>
+        <p:cNvPr id="1" name="">
+          <a:extLst>
+            <a:ext uri="{FF2B5EF4-FFF2-40B4-BE49-F238E27FC236}">
+              <a16:creationId xmlns:a16="http://schemas.microsoft.com/office/drawing/2014/main" id="{EB0CA10B-D327-B15F-832E-044E343BB066}"/>
+            </a:ext>
+          </a:extLst>
+        </p:cNvPr>
+        <p:cNvGrpSpPr/>
+        <p:nvPr/>
+      </p:nvGrpSpPr>
+      <p:grpSpPr>
+        <a:xfrm>
+          <a:off x="0" y="0"/>
+          <a:ext cx="0" cy="0"/>
+          <a:chOff x="0" y="0"/>
+          <a:chExt cx="0" cy="0"/>
+        </a:xfrm>
+      </p:grpSpPr>
+      <p:pic>
+        <p:nvPicPr>
+          <p:cNvPr id="5" name="Imagem 4">
+            <a:extLst>
+              <a:ext uri="{FF2B5EF4-FFF2-40B4-BE49-F238E27FC236}">
+                <a16:creationId xmlns:a16="http://schemas.microsoft.com/office/drawing/2014/main" id="{7CA7A020-2B8A-074C-9A19-B76DE0D5E77B}"/>
+              </a:ext>
+            </a:extLst>
+          </p:cNvPr>
+          <p:cNvPicPr>
+            <a:picLocks noChangeAspect="1"/>
+          </p:cNvPicPr>
+          <p:nvPr/>
+        </p:nvPicPr>
+        <p:blipFill>
+          <a:blip r:embed="rId2"/>
+          <a:stretch>
+            <a:fillRect/>
+          </a:stretch>
+        </p:blipFill>
+        <p:spPr>
+          <a:xfrm>
+            <a:off x="0" y="313194"/>
+            <a:ext cx="9907383" cy="6449325"/>
+          </a:xfrm>
+          <a:prstGeom prst="rect">
+            <a:avLst/>
+          </a:prstGeom>
+        </p:spPr>
+      </p:pic>
+      <p:sp>
+        <p:nvSpPr>
+          <p:cNvPr id="2" name="Título 1">
+            <a:extLst>
+              <a:ext uri="{FF2B5EF4-FFF2-40B4-BE49-F238E27FC236}">
+                <a16:creationId xmlns:a16="http://schemas.microsoft.com/office/drawing/2014/main" id="{E23FDE0E-C646-C11C-28D8-DCAB725FFA58}"/>
+              </a:ext>
+            </a:extLst>
+          </p:cNvPr>
+          <p:cNvSpPr>
+            <a:spLocks noGrp="1"/>
+          </p:cNvSpPr>
+          <p:nvPr>
+            <p:ph type="ctrTitle"/>
+          </p:nvPr>
+        </p:nvSpPr>
+        <p:spPr>
+          <a:xfrm>
+            <a:off x="6531428" y="0"/>
+            <a:ext cx="5660571" cy="989466"/>
+          </a:xfrm>
+        </p:spPr>
+        <p:txBody>
+          <a:bodyPr/>
+          <a:lstStyle/>
+          <a:p>
+            <a:r>
+              <a:rPr lang="pt-BR" dirty="0" err="1"/>
+              <a:t>Heap</a:t>
+            </a:r>
+            <a:r>
+              <a:rPr lang="pt-BR" dirty="0"/>
+              <a:t> Short</a:t>
+            </a:r>
+          </a:p>
+        </p:txBody>
+      </p:sp>
+      <p:sp>
+        <p:nvSpPr>
+          <p:cNvPr id="3" name="Subtítulo 2">
+            <a:extLst>
+              <a:ext uri="{FF2B5EF4-FFF2-40B4-BE49-F238E27FC236}">
+                <a16:creationId xmlns:a16="http://schemas.microsoft.com/office/drawing/2014/main" id="{BD4A1F86-0AD7-BFCF-D1CF-3D0098499B89}"/>
+              </a:ext>
+            </a:extLst>
+          </p:cNvPr>
+          <p:cNvSpPr>
+            <a:spLocks noGrp="1"/>
+          </p:cNvSpPr>
+          <p:nvPr>
+            <p:ph type="subTitle" idx="1"/>
+          </p:nvPr>
+        </p:nvSpPr>
+        <p:spPr>
+          <a:xfrm>
+            <a:off x="228600" y="892628"/>
+            <a:ext cx="11963400" cy="5965372"/>
+          </a:xfrm>
+        </p:spPr>
+        <p:txBody>
+          <a:bodyPr>
+            <a:normAutofit/>
+          </a:bodyPr>
+          <a:lstStyle/>
+          <a:p>
+            <a:pPr algn="l"/>
+            <a:endParaRPr lang="pt-BR" dirty="0"/>
+          </a:p>
+          <a:p>
+            <a:pPr algn="l"/>
+            <a:endParaRPr lang="pt-BR" sz="2800" dirty="0"/>
+          </a:p>
+        </p:txBody>
+      </p:sp>
+    </p:spTree>
+    <p:extLst>
+      <p:ext uri="{BB962C8B-B14F-4D97-AF65-F5344CB8AC3E}">
+        <p14:creationId xmlns:p14="http://schemas.microsoft.com/office/powerpoint/2010/main" val="1493834522"/>
+      </p:ext>
+    </p:extLst>
+  </p:cSld>
+  <p:clrMapOvr>
+    <a:masterClrMapping/>
+  </p:clrMapOvr>
+</p:sld>
+</file>
+
 <file path=ppt/slides/slide2.xml><?xml version="1.0" encoding="utf-8"?>
 <p:sld xmlns:a="http://schemas.openxmlformats.org/drawingml/2006/main" xmlns:r="http://schemas.openxmlformats.org/officeDocument/2006/relationships" xmlns:p="http://schemas.openxmlformats.org/presentationml/2006/main">
   <p:cSld>
@@ -5290,6 +5438,286 @@
     <p:extLst>
       <p:ext uri="{BB962C8B-B14F-4D97-AF65-F5344CB8AC3E}">
         <p14:creationId xmlns:p14="http://schemas.microsoft.com/office/powerpoint/2010/main" val="1169281850"/>
+      </p:ext>
+    </p:extLst>
+  </p:cSld>
+  <p:clrMapOvr>
+    <a:masterClrMapping/>
+  </p:clrMapOvr>
+</p:sld>
+</file>
+
+<file path=ppt/slides/slide20.xml><?xml version="1.0" encoding="utf-8"?>
+<p:sld xmlns:a="http://schemas.openxmlformats.org/drawingml/2006/main" xmlns:r="http://schemas.openxmlformats.org/officeDocument/2006/relationships" xmlns:p="http://schemas.openxmlformats.org/presentationml/2006/main">
+  <p:cSld>
+    <p:spTree>
+      <p:nvGrpSpPr>
+        <p:cNvPr id="1" name="">
+          <a:extLst>
+            <a:ext uri="{FF2B5EF4-FFF2-40B4-BE49-F238E27FC236}">
+              <a16:creationId xmlns:a16="http://schemas.microsoft.com/office/drawing/2014/main" id="{88941CC9-692A-3D71-5178-0517227A6746}"/>
+            </a:ext>
+          </a:extLst>
+        </p:cNvPr>
+        <p:cNvGrpSpPr/>
+        <p:nvPr/>
+      </p:nvGrpSpPr>
+      <p:grpSpPr>
+        <a:xfrm>
+          <a:off x="0" y="0"/>
+          <a:ext cx="0" cy="0"/>
+          <a:chOff x="0" y="0"/>
+          <a:chExt cx="0" cy="0"/>
+        </a:xfrm>
+      </p:grpSpPr>
+      <p:sp>
+        <p:nvSpPr>
+          <p:cNvPr id="2" name="Título 1">
+            <a:extLst>
+              <a:ext uri="{FF2B5EF4-FFF2-40B4-BE49-F238E27FC236}">
+                <a16:creationId xmlns:a16="http://schemas.microsoft.com/office/drawing/2014/main" id="{2C1024DC-D25E-3B41-25E5-EA3A0412E49B}"/>
+              </a:ext>
+            </a:extLst>
+          </p:cNvPr>
+          <p:cNvSpPr>
+            <a:spLocks noGrp="1"/>
+          </p:cNvSpPr>
+          <p:nvPr>
+            <p:ph type="ctrTitle"/>
+          </p:nvPr>
+        </p:nvSpPr>
+        <p:spPr>
+          <a:xfrm>
+            <a:off x="6531428" y="0"/>
+            <a:ext cx="5660571" cy="989466"/>
+          </a:xfrm>
+        </p:spPr>
+        <p:txBody>
+          <a:bodyPr/>
+          <a:lstStyle/>
+          <a:p>
+            <a:r>
+              <a:rPr lang="pt-BR" dirty="0" err="1"/>
+              <a:t>Heap</a:t>
+            </a:r>
+            <a:r>
+              <a:rPr lang="pt-BR" dirty="0"/>
+              <a:t> Short</a:t>
+            </a:r>
+          </a:p>
+        </p:txBody>
+      </p:sp>
+      <p:sp>
+        <p:nvSpPr>
+          <p:cNvPr id="3" name="Subtítulo 2">
+            <a:extLst>
+              <a:ext uri="{FF2B5EF4-FFF2-40B4-BE49-F238E27FC236}">
+                <a16:creationId xmlns:a16="http://schemas.microsoft.com/office/drawing/2014/main" id="{997BD49C-AFE9-6C76-C079-AAE56EE97B2D}"/>
+              </a:ext>
+            </a:extLst>
+          </p:cNvPr>
+          <p:cNvSpPr>
+            <a:spLocks noGrp="1"/>
+          </p:cNvSpPr>
+          <p:nvPr>
+            <p:ph type="subTitle" idx="1"/>
+          </p:nvPr>
+        </p:nvSpPr>
+        <p:spPr>
+          <a:xfrm>
+            <a:off x="228600" y="892628"/>
+            <a:ext cx="11963400" cy="5965372"/>
+          </a:xfrm>
+        </p:spPr>
+        <p:txBody>
+          <a:bodyPr>
+            <a:normAutofit/>
+          </a:bodyPr>
+          <a:lstStyle/>
+          <a:p>
+            <a:pPr algn="l"/>
+            <a:endParaRPr lang="pt-BR" dirty="0"/>
+          </a:p>
+          <a:p>
+            <a:pPr algn="l"/>
+            <a:endParaRPr lang="pt-BR" sz="2800" dirty="0"/>
+          </a:p>
+        </p:txBody>
+      </p:sp>
+      <p:pic>
+        <p:nvPicPr>
+          <p:cNvPr id="6" name="Imagem 5">
+            <a:extLst>
+              <a:ext uri="{FF2B5EF4-FFF2-40B4-BE49-F238E27FC236}">
+                <a16:creationId xmlns:a16="http://schemas.microsoft.com/office/drawing/2014/main" id="{93CC5F00-56AB-EEF4-5D30-3904DA61537F}"/>
+              </a:ext>
+            </a:extLst>
+          </p:cNvPr>
+          <p:cNvPicPr>
+            <a:picLocks noChangeAspect="1"/>
+          </p:cNvPicPr>
+          <p:nvPr/>
+        </p:nvPicPr>
+        <p:blipFill>
+          <a:blip r:embed="rId2"/>
+          <a:stretch>
+            <a:fillRect/>
+          </a:stretch>
+        </p:blipFill>
+        <p:spPr>
+          <a:xfrm>
+            <a:off x="0" y="124796"/>
+            <a:ext cx="7282543" cy="6657004"/>
+          </a:xfrm>
+          <a:prstGeom prst="rect">
+            <a:avLst/>
+          </a:prstGeom>
+        </p:spPr>
+      </p:pic>
+    </p:spTree>
+    <p:extLst>
+      <p:ext uri="{BB962C8B-B14F-4D97-AF65-F5344CB8AC3E}">
+        <p14:creationId xmlns:p14="http://schemas.microsoft.com/office/powerpoint/2010/main" val="1337427087"/>
+      </p:ext>
+    </p:extLst>
+  </p:cSld>
+  <p:clrMapOvr>
+    <a:masterClrMapping/>
+  </p:clrMapOvr>
+</p:sld>
+</file>
+
+<file path=ppt/slides/slide21.xml><?xml version="1.0" encoding="utf-8"?>
+<p:sld xmlns:a="http://schemas.openxmlformats.org/drawingml/2006/main" xmlns:r="http://schemas.openxmlformats.org/officeDocument/2006/relationships" xmlns:p="http://schemas.openxmlformats.org/presentationml/2006/main">
+  <p:cSld>
+    <p:spTree>
+      <p:nvGrpSpPr>
+        <p:cNvPr id="1" name="">
+          <a:extLst>
+            <a:ext uri="{FF2B5EF4-FFF2-40B4-BE49-F238E27FC236}">
+              <a16:creationId xmlns:a16="http://schemas.microsoft.com/office/drawing/2014/main" id="{552B1649-81F1-A3C4-E5D0-06A45CAE6DC7}"/>
+            </a:ext>
+          </a:extLst>
+        </p:cNvPr>
+        <p:cNvGrpSpPr/>
+        <p:nvPr/>
+      </p:nvGrpSpPr>
+      <p:grpSpPr>
+        <a:xfrm>
+          <a:off x="0" y="0"/>
+          <a:ext cx="0" cy="0"/>
+          <a:chOff x="0" y="0"/>
+          <a:chExt cx="0" cy="0"/>
+        </a:xfrm>
+      </p:grpSpPr>
+      <p:sp>
+        <p:nvSpPr>
+          <p:cNvPr id="2" name="Título 1">
+            <a:extLst>
+              <a:ext uri="{FF2B5EF4-FFF2-40B4-BE49-F238E27FC236}">
+                <a16:creationId xmlns:a16="http://schemas.microsoft.com/office/drawing/2014/main" id="{D7DCA97E-121D-22DD-6A9A-2FBA9A2C6F5C}"/>
+              </a:ext>
+            </a:extLst>
+          </p:cNvPr>
+          <p:cNvSpPr>
+            <a:spLocks noGrp="1"/>
+          </p:cNvSpPr>
+          <p:nvPr>
+            <p:ph type="ctrTitle"/>
+          </p:nvPr>
+        </p:nvSpPr>
+        <p:spPr>
+          <a:xfrm>
+            <a:off x="6531428" y="0"/>
+            <a:ext cx="5660571" cy="989466"/>
+          </a:xfrm>
+        </p:spPr>
+        <p:txBody>
+          <a:bodyPr/>
+          <a:lstStyle/>
+          <a:p>
+            <a:r>
+              <a:rPr lang="pt-BR" dirty="0" err="1"/>
+              <a:t>Heap</a:t>
+            </a:r>
+            <a:r>
+              <a:rPr lang="pt-BR" dirty="0"/>
+              <a:t> Short</a:t>
+            </a:r>
+          </a:p>
+        </p:txBody>
+      </p:sp>
+      <p:sp>
+        <p:nvSpPr>
+          <p:cNvPr id="3" name="Subtítulo 2">
+            <a:extLst>
+              <a:ext uri="{FF2B5EF4-FFF2-40B4-BE49-F238E27FC236}">
+                <a16:creationId xmlns:a16="http://schemas.microsoft.com/office/drawing/2014/main" id="{5C658611-B827-2EE2-89DF-34CD487DD1A4}"/>
+              </a:ext>
+            </a:extLst>
+          </p:cNvPr>
+          <p:cNvSpPr>
+            <a:spLocks noGrp="1"/>
+          </p:cNvSpPr>
+          <p:nvPr>
+            <p:ph type="subTitle" idx="1"/>
+          </p:nvPr>
+        </p:nvSpPr>
+        <p:spPr>
+          <a:xfrm>
+            <a:off x="228600" y="892628"/>
+            <a:ext cx="11963400" cy="5965372"/>
+          </a:xfrm>
+        </p:spPr>
+        <p:txBody>
+          <a:bodyPr>
+            <a:normAutofit/>
+          </a:bodyPr>
+          <a:lstStyle/>
+          <a:p>
+            <a:pPr algn="l"/>
+            <a:endParaRPr lang="pt-BR" dirty="0"/>
+          </a:p>
+          <a:p>
+            <a:pPr algn="l"/>
+            <a:endParaRPr lang="pt-BR" sz="2800" dirty="0"/>
+          </a:p>
+        </p:txBody>
+      </p:sp>
+      <p:pic>
+        <p:nvPicPr>
+          <p:cNvPr id="5" name="Imagem 4">
+            <a:extLst>
+              <a:ext uri="{FF2B5EF4-FFF2-40B4-BE49-F238E27FC236}">
+                <a16:creationId xmlns:a16="http://schemas.microsoft.com/office/drawing/2014/main" id="{F36AAC94-F1A3-6D75-D94A-758E4DA2B0B5}"/>
+              </a:ext>
+            </a:extLst>
+          </p:cNvPr>
+          <p:cNvPicPr>
+            <a:picLocks noChangeAspect="1"/>
+          </p:cNvPicPr>
+          <p:nvPr/>
+        </p:nvPicPr>
+        <p:blipFill>
+          <a:blip r:embed="rId2"/>
+          <a:stretch>
+            <a:fillRect/>
+          </a:stretch>
+        </p:blipFill>
+        <p:spPr>
+          <a:xfrm>
+            <a:off x="0" y="0"/>
+            <a:ext cx="7544853" cy="6858000"/>
+          </a:xfrm>
+          <a:prstGeom prst="rect">
+            <a:avLst/>
+          </a:prstGeom>
+        </p:spPr>
+      </p:pic>
+    </p:spTree>
+    <p:extLst>
+      <p:ext uri="{BB962C8B-B14F-4D97-AF65-F5344CB8AC3E}">
+        <p14:creationId xmlns:p14="http://schemas.microsoft.com/office/powerpoint/2010/main" val="654870683"/>
       </p:ext>
     </p:extLst>
   </p:cSld>
